--- a/presentations/02_CenGeometry_Critical_Evaluation.pptx
+++ b/presentations/02_CenGeometry_Critical_Evaluation.pptx
@@ -4355,7 +4355,7 @@
                 <a:ea typeface="Calibri" pitchFamily="34" charset="-122"/>
                 <a:cs typeface="Calibri" pitchFamily="34" charset="-120"/>
               </a:rPr>
-              <a:t>OK / HARD / FORBIDDEN limits were reasoned, not measured. Tested: scaling all bands 0.5×–2× leaves the qualitative conclusion intact, but flips the spoke's label between OK and HARD. So the ranking is robust; the labels are not.</a:t>
+              <a:t>OK / HARD / SEVERE limits were reasoned, not measured. Tested: scaling all bands 0.5×–2× leaves the qualitative conclusion intact, but flips the spoke's label between OK and HARD. So the ranking is robust; the labels are not.</a:t>
             </a:r>
             <a:endParaRPr lang="en-US" sz="1400" dirty="0"/>
           </a:p>

--- a/presentations/02_CenGeometry_Critical_Evaluation.pptx
+++ b/presentations/02_CenGeometry_Critical_Evaluation.pptx
@@ -14,9 +14,10 @@
     <p:sldId id="262" r:id="rId8"/>
     <p:sldId id="263" r:id="rId9"/>
     <p:sldId id="264" r:id="rId10"/>
+    <p:sldId id="265" r:id="rId11"/>
   </p:sldIdLst>
   <p:notesMasterIdLst>
-    <p:notesMasterId r:id="rId11"/>
+    <p:notesMasterId r:id="rId12"/>
   </p:notesMasterIdLst>
   <p:sldSz cx="12192000" cy="6858000"/>
   <p:notesSz cx="6858000" cy="12192000"/>
@@ -127,7 +128,7 @@
           <a:lstStyle/>
           <a:p>
             <a:pPr>
-              <a:defRPr sz="1300" b="0" i="0" u="none" strike="noStrike">
+              <a:defRPr sz="1200" b="0" i="0" u="none" strike="noStrike">
                 <a:solidFill>
                   <a:srgbClr val="000000"/>
                 </a:solidFill>
@@ -135,13 +136,13 @@
               </a:defRPr>
             </a:pPr>
             <a:r>
-              <a:rPr sz="1300" b="0" i="0" u="none" strike="noStrike">
+              <a:rPr sz="1200" b="0" i="0" u="none" strike="noStrike">
                 <a:solidFill>
                   <a:srgbClr val="000000"/>
                 </a:solidFill>
                 <a:latin typeface="Arial"/>
               </a:rPr>
-              <a:t>Wall-clock per configuration</a:t>
+              <a:t>Wall-clock per configuration (chain solver)</a:t>
             </a:r>
           </a:p>
         </c:rich>
@@ -172,7 +173,7 @@
           </c:tx>
           <c:spPr>
             <a:solidFill>
-              <a:srgbClr val="D97706"/>
+              <a:srgbClr val="2E7D32"/>
             </a:solidFill>
             <a:effectLst/>
           </c:spPr>
@@ -203,18 +204,24 @@
           </c:dLbls>
           <c:cat>
             <c:multiLvlStrRef>
-              <c:f>Sheet1!$A$2:$A$4</c:f>
+              <c:f>Sheet1!$A$2:$A$6</c:f>
               <c:multiLvlStrCache>
-                <c:ptCount val="3"/>
+                <c:ptCount val="5"/>
                 <c:lvl>
                   <c:pt idx="0">
-                    <c:v>typical</c:v>
+                    <c:v>wild type</c:v>
                   </c:pt>
                   <c:pt idx="1">
+                    <c:v>8 cw / 9 mt</c:v>
+                  </c:pt>
+                  <c:pt idx="2">
                     <c:v>n_pf = 9</c:v>
                   </c:pt>
-                  <c:pt idx="2">
+                  <c:pt idx="3">
                     <c:v>n_pf = 18</c:v>
+                  </c:pt>
+                  <c:pt idx="4">
+                    <c:v>spoke 28 nm</c:v>
                   </c:pt>
                 </c:lvl>
               </c:multiLvlStrCache>
@@ -222,18 +229,24 @@
           </c:cat>
           <c:val>
             <c:numRef>
-              <c:f>Sheet1!$B$2:$B$4</c:f>
+              <c:f>Sheet1!$B$2:$B$6</c:f>
               <c:numCache>
                 <c:formatCode>General</c:formatCode>
-                <c:ptCount val="3"/>
+                <c:ptCount val="5"/>
                 <c:pt idx="0">
-                  <c:v>2</c:v>
+                  <c:v>0.44</c:v>
                 </c:pt>
                 <c:pt idx="1">
-                  <c:v>28.5</c:v>
+                  <c:v>1.28</c:v>
                 </c:pt>
                 <c:pt idx="2">
-                  <c:v>257</c:v>
+                  <c:v>1.7</c:v>
+                </c:pt>
+                <c:pt idx="3">
+                  <c:v>2.86</c:v>
+                </c:pt>
+                <c:pt idx="4">
+                  <c:v>0.86</c:v>
                 </c:pt>
               </c:numCache>
             </c:numRef>
@@ -803,6 +816,94 @@
             <a:fld id="{F7021451-1387-4CA6-816F-3879F97B5CBC}" type="slidenum">
               <a:rPr lang="en-US"/>
               <a:t>1</a:t>
+            </a:fld>
+            <a:endParaRPr lang="en-US"/>
+          </a:p>
+        </p:txBody>
+      </p:sp>
+    </p:spTree>
+    <p:extLst>
+      <p:ext uri="{BB962C8B-B14F-4D97-AF65-F5344CB8AC3E}">
+        <p14:creationId xmlns:p14="http://schemas.microsoft.com/office/powerpoint/2010/main" val="1024086991"/>
+      </p:ext>
+    </p:extLst>
+  </p:cSld>
+  <p:clrMapOvr>
+    <a:masterClrMapping/>
+  </p:clrMapOvr>
+</p:notes>
+</file>
+
+<file path=ppt/notesSlides/notesSlide10.xml><?xml version="1.0" encoding="utf-8"?>
+<p:notes xmlns:a="http://schemas.openxmlformats.org/drawingml/2006/main" xmlns:r="http://schemas.openxmlformats.org/officeDocument/2006/relationships" xmlns:p="http://schemas.openxmlformats.org/presentationml/2006/main">
+  <p:cSld>
+    <p:spTree>
+      <p:nvGrpSpPr>
+        <p:cNvPr id="1" name=""/>
+        <p:cNvGrpSpPr/>
+        <p:nvPr/>
+      </p:nvGrpSpPr>
+      <p:grpSpPr>
+        <a:xfrm>
+          <a:off x="0" y="0"/>
+          <a:ext cx="0" cy="0"/>
+          <a:chOff x="0" y="0"/>
+          <a:chExt cx="0" cy="0"/>
+        </a:xfrm>
+      </p:grpSpPr>
+      <p:sp>
+        <p:nvSpPr>
+          <p:cNvPr id="2" name="Slide Image Placeholder 1"/>
+          <p:cNvSpPr>
+            <a:spLocks noGrp="1" noRot="1" noChangeAspect="1"/>
+          </p:cNvSpPr>
+          <p:nvPr>
+            <p:ph type="sldImg"/>
+          </p:nvPr>
+        </p:nvSpPr>
+        <p:spPr/>
+      </p:sp>
+      <p:sp>
+        <p:nvSpPr>
+          <p:cNvPr id="3" name="Notes Placeholder 2"/>
+          <p:cNvSpPr>
+            <a:spLocks noGrp="1"/>
+          </p:cNvSpPr>
+          <p:nvPr>
+            <p:ph type="body" idx="1"/>
+          </p:nvPr>
+        </p:nvSpPr>
+        <p:spPr/>
+        <p:txBody>
+          <a:bodyPr/>
+          <a:lstStyle/>
+          <a:p>
+            <a:r>
+              <a:rPr lang="en-US" dirty="0"/>
+              <a:t/>
+            </a:r>
+            <a:endParaRPr lang="en-US" dirty="0"/>
+          </a:p>
+        </p:txBody>
+      </p:sp>
+      <p:sp>
+        <p:nvSpPr>
+          <p:cNvPr id="4" name="Slide Number Placeholder 3"/>
+          <p:cNvSpPr>
+            <a:spLocks noGrp="1"/>
+          </p:cNvSpPr>
+          <p:nvPr>
+            <p:ph type="sldNum" sz="quarter" idx="10"/>
+          </p:nvPr>
+        </p:nvSpPr>
+        <p:spPr/>
+        <p:txBody>
+          <a:bodyPr/>
+          <a:lstStyle/>
+          <a:p>
+            <a:fld id="{F7021451-1387-4CA6-816F-3879F97B5CBC}" type="slidenum">
+              <a:rPr lang="en-US"/>
+              <a:t>10</a:t>
             </a:fld>
             <a:endParaRPr lang="en-US"/>
           </a:p>
@@ -2037,6 +2138,502 @@
 </p:sld>
 </file>
 
+<file path=ppt/slides/slide10.xml><?xml version="1.0" encoding="utf-8"?>
+<p:sld xmlns:a="http://schemas.openxmlformats.org/drawingml/2006/main" xmlns:r="http://schemas.openxmlformats.org/officeDocument/2006/relationships" xmlns:p="http://schemas.openxmlformats.org/presentationml/2006/main">
+  <p:cSld name="Slide 10">
+    <p:bg>
+      <p:bgPr>
+        <a:solidFill>
+          <a:srgbClr val="1B1035"/>
+        </a:solidFill>
+      </p:bgPr>
+    </p:bg>
+    <p:spTree>
+      <p:nvGrpSpPr>
+        <p:cNvPr id="1" name=""/>
+        <p:cNvGrpSpPr/>
+        <p:nvPr/>
+      </p:nvGrpSpPr>
+      <p:grpSpPr>
+        <a:xfrm>
+          <a:off x="0" y="0"/>
+          <a:ext cx="0" cy="0"/>
+          <a:chOff x="0" y="0"/>
+          <a:chExt cx="0" cy="0"/>
+        </a:xfrm>
+      </p:grpSpPr>
+      <p:sp>
+        <p:nvSpPr>
+          <p:cNvPr id="2" name="Text 0"/>
+          <p:cNvSpPr/>
+          <p:nvPr/>
+        </p:nvSpPr>
+        <p:spPr>
+          <a:xfrm>
+            <a:off x="822960" y="640080"/>
+            <a:ext cx="10515600" cy="731520"/>
+          </a:xfrm>
+          <a:prstGeom prst="rect">
+            <a:avLst/>
+          </a:prstGeom>
+          <a:noFill/>
+          <a:ln/>
+        </p:spPr>
+        <p:txBody>
+          <a:bodyPr wrap="square" rtlCol="0" anchor="ctr"/>
+          <a:lstStyle/>
+          <a:p>
+            <a:pPr indent="0" marL="0">
+              <a:buNone/>
+            </a:pPr>
+            <a:r>
+              <a:rPr lang="en-US" sz="3200" b="1" dirty="0">
+                <a:solidFill>
+                  <a:srgbClr val="FFFFFF"/>
+                </a:solidFill>
+                <a:latin typeface="Cambria" pitchFamily="34" charset="0"/>
+                <a:ea typeface="Cambria" pitchFamily="34" charset="-122"/>
+                <a:cs typeface="Cambria" pitchFamily="34" charset="-120"/>
+              </a:rPr>
+              <a:t>What you can and cannot conclude today</a:t>
+            </a:r>
+            <a:endParaRPr lang="en-US" sz="3200" dirty="0"/>
+          </a:p>
+        </p:txBody>
+      </p:sp>
+      <p:sp>
+        <p:nvSpPr>
+          <p:cNvPr id="3" name="Shape 1"/>
+          <p:cNvSpPr/>
+          <p:nvPr/>
+        </p:nvSpPr>
+        <p:spPr>
+          <a:xfrm>
+            <a:off x="822960" y="1600200"/>
+            <a:ext cx="5120640" cy="4023360"/>
+          </a:xfrm>
+          <a:prstGeom prst="roundRect">
+            <a:avLst>
+              <a:gd name="adj" fmla="val 1818"/>
+            </a:avLst>
+          </a:prstGeom>
+          <a:solidFill>
+            <a:srgbClr val="16351F"/>
+          </a:solidFill>
+          <a:ln w="12700">
+            <a:solidFill>
+              <a:srgbClr val="2E7D32"/>
+            </a:solidFill>
+            <a:prstDash val="solid"/>
+          </a:ln>
+        </p:spPr>
+      </p:sp>
+      <p:sp>
+        <p:nvSpPr>
+          <p:cNvPr id="4" name="Text 2"/>
+          <p:cNvSpPr/>
+          <p:nvPr/>
+        </p:nvSpPr>
+        <p:spPr>
+          <a:xfrm>
+            <a:off x="1097280" y="1783080"/>
+            <a:ext cx="4572000" cy="365760"/>
+          </a:xfrm>
+          <a:prstGeom prst="rect">
+            <a:avLst/>
+          </a:prstGeom>
+          <a:noFill/>
+          <a:ln/>
+        </p:spPr>
+        <p:txBody>
+          <a:bodyPr wrap="square" rtlCol="0" anchor="ctr"/>
+          <a:lstStyle/>
+          <a:p>
+            <a:pPr indent="0" marL="0">
+              <a:buNone/>
+            </a:pPr>
+            <a:r>
+              <a:rPr lang="en-US" sz="1700" b="1" dirty="0">
+                <a:solidFill>
+                  <a:srgbClr val="7BC67B"/>
+                </a:solidFill>
+                <a:latin typeface="Calibri" pitchFamily="34" charset="0"/>
+                <a:ea typeface="Calibri" pitchFamily="34" charset="-122"/>
+                <a:cs typeface="Calibri" pitchFamily="34" charset="-120"/>
+              </a:rPr>
+              <a:t>SAFE</a:t>
+            </a:r>
+            <a:endParaRPr lang="en-US" sz="1700" dirty="0"/>
+          </a:p>
+        </p:txBody>
+      </p:sp>
+      <p:sp>
+        <p:nvSpPr>
+          <p:cNvPr id="5" name="Text 3"/>
+          <p:cNvSpPr/>
+          <p:nvPr/>
+        </p:nvSpPr>
+        <p:spPr>
+          <a:xfrm>
+            <a:off x="1097280" y="2240280"/>
+            <a:ext cx="4572000" cy="3200400"/>
+          </a:xfrm>
+          <a:prstGeom prst="rect">
+            <a:avLst/>
+          </a:prstGeom>
+          <a:noFill/>
+          <a:ln/>
+        </p:spPr>
+        <p:txBody>
+          <a:bodyPr wrap="square" rtlCol="0" anchor="ctr"/>
+          <a:lstStyle/>
+          <a:p>
+            <a:pPr marL="342900" indent="-342900">
+              <a:spcAft>
+                <a:spcPts val="800"/>
+              </a:spcAft>
+              <a:buSzPct val="100000"/>
+              <a:buChar char="•"/>
+            </a:pPr>
+            <a:r>
+              <a:rPr lang="en-US" sz="1350" dirty="0">
+                <a:solidFill>
+                  <a:srgbClr val="D8E8D8"/>
+                </a:solidFill>
+                <a:latin typeface="Calibri" pitchFamily="34" charset="0"/>
+                <a:ea typeface="Calibri" pitchFamily="34" charset="-122"/>
+                <a:cs typeface="Calibri" pitchFamily="34" charset="-120"/>
+              </a:rPr>
+              <a:t>Relative comparisons — mutant against wild type, one perturbation against another</a:t>
+            </a:r>
+            <a:endParaRPr lang="en-US" sz="1350" dirty="0"/>
+          </a:p>
+          <a:p>
+            <a:pPr marL="342900" indent="-342900">
+              <a:spcAft>
+                <a:spcPts val="800"/>
+              </a:spcAft>
+              <a:buSzPct val="100000"/>
+              <a:buChar char="•"/>
+            </a:pPr>
+            <a:r>
+              <a:rPr lang="en-US" sz="1350" dirty="0">
+                <a:solidFill>
+                  <a:srgbClr val="D8E8D8"/>
+                </a:solidFill>
+                <a:latin typeface="Calibri" pitchFamily="34" charset="0"/>
+                <a:ea typeface="Calibri" pitchFamily="34" charset="-122"/>
+                <a:cs typeface="Calibri" pitchFamily="34" charset="-120"/>
+              </a:rPr>
+              <a:t>The ordering of which connection is most loaded</a:t>
+            </a:r>
+            <a:endParaRPr lang="en-US" sz="1350" dirty="0"/>
+          </a:p>
+          <a:p>
+            <a:pPr marL="342900" indent="-342900">
+              <a:spcAft>
+                <a:spcPts val="800"/>
+              </a:spcAft>
+              <a:buSzPct val="100000"/>
+              <a:buChar char="•"/>
+            </a:pPr>
+            <a:r>
+              <a:rPr lang="en-US" sz="1350" dirty="0">
+                <a:solidFill>
+                  <a:srgbClr val="D8E8D8"/>
+                </a:solidFill>
+                <a:latin typeface="Calibri" pitchFamily="34" charset="0"/>
+                <a:ea typeface="Calibri" pitchFamily="34" charset="-122"/>
+                <a:cs typeface="Calibri" pitchFamily="34" charset="-120"/>
+              </a:rPr>
+              <a:t>Whether a proposed architecture is geometrically possible at all</a:t>
+            </a:r>
+            <a:endParaRPr lang="en-US" sz="1350" dirty="0"/>
+          </a:p>
+          <a:p>
+            <a:pPr marL="342900" indent="-342900">
+              <a:spcAft>
+                <a:spcPts val="800"/>
+              </a:spcAft>
+              <a:buSzPct val="100000"/>
+              <a:buChar char="•"/>
+            </a:pPr>
+            <a:r>
+              <a:rPr lang="en-US" sz="1350" dirty="0">
+                <a:solidFill>
+                  <a:srgbClr val="D8E8D8"/>
+                </a:solidFill>
+                <a:latin typeface="Calibri" pitchFamily="34" charset="0"/>
+                <a:ea typeface="Calibri" pitchFamily="34" charset="-122"/>
+                <a:cs typeface="Calibri" pitchFamily="34" charset="-120"/>
+              </a:rPr>
+              <a:t>Diameter predictions, the one output with independent support</a:t>
+            </a:r>
+            <a:endParaRPr lang="en-US" sz="1350" dirty="0"/>
+          </a:p>
+          <a:p>
+            <a:pPr marL="342900" indent="-342900">
+              <a:spcAft>
+                <a:spcPts val="800"/>
+              </a:spcAft>
+              <a:buSzPct val="100000"/>
+              <a:buChar char="•"/>
+            </a:pPr>
+            <a:r>
+              <a:rPr lang="en-US" sz="1350" dirty="0">
+                <a:solidFill>
+                  <a:srgbClr val="D8E8D8"/>
+                </a:solidFill>
+                <a:latin typeface="Calibri" pitchFamily="34" charset="0"/>
+                <a:ea typeface="Calibri" pitchFamily="34" charset="-122"/>
+                <a:cs typeface="Calibri" pitchFamily="34" charset="-120"/>
+              </a:rPr>
+              <a:t>Generating hypotheses worth testing at the bench</a:t>
+            </a:r>
+            <a:endParaRPr lang="en-US" sz="1350" dirty="0"/>
+          </a:p>
+        </p:txBody>
+      </p:sp>
+      <p:sp>
+        <p:nvSpPr>
+          <p:cNvPr id="6" name="Shape 4"/>
+          <p:cNvSpPr/>
+          <p:nvPr/>
+        </p:nvSpPr>
+        <p:spPr>
+          <a:xfrm>
+            <a:off x="6263640" y="1600200"/>
+            <a:ext cx="5074920" cy="4023360"/>
+          </a:xfrm>
+          <a:prstGeom prst="roundRect">
+            <a:avLst>
+              <a:gd name="adj" fmla="val 1818"/>
+            </a:avLst>
+          </a:prstGeom>
+          <a:solidFill>
+            <a:srgbClr val="3A1620"/>
+          </a:solidFill>
+          <a:ln w="12700">
+            <a:solidFill>
+              <a:srgbClr val="C62828"/>
+            </a:solidFill>
+            <a:prstDash val="solid"/>
+          </a:ln>
+        </p:spPr>
+      </p:sp>
+      <p:sp>
+        <p:nvSpPr>
+          <p:cNvPr id="7" name="Text 5"/>
+          <p:cNvSpPr/>
+          <p:nvPr/>
+        </p:nvSpPr>
+        <p:spPr>
+          <a:xfrm>
+            <a:off x="6537960" y="1783080"/>
+            <a:ext cx="4572000" cy="365760"/>
+          </a:xfrm>
+          <a:prstGeom prst="rect">
+            <a:avLst/>
+          </a:prstGeom>
+          <a:noFill/>
+          <a:ln/>
+        </p:spPr>
+        <p:txBody>
+          <a:bodyPr wrap="square" rtlCol="0" anchor="ctr"/>
+          <a:lstStyle/>
+          <a:p>
+            <a:pPr indent="0" marL="0">
+              <a:buNone/>
+            </a:pPr>
+            <a:r>
+              <a:rPr lang="en-US" sz="1700" b="1" dirty="0">
+                <a:solidFill>
+                  <a:srgbClr val="F09A9A"/>
+                </a:solidFill>
+                <a:latin typeface="Calibri" pitchFamily="34" charset="0"/>
+                <a:ea typeface="Calibri" pitchFamily="34" charset="-122"/>
+                <a:cs typeface="Calibri" pitchFamily="34" charset="-120"/>
+              </a:rPr>
+              <a:t>NOT SAFE</a:t>
+            </a:r>
+            <a:endParaRPr lang="en-US" sz="1700" dirty="0"/>
+          </a:p>
+        </p:txBody>
+      </p:sp>
+      <p:sp>
+        <p:nvSpPr>
+          <p:cNvPr id="8" name="Text 6"/>
+          <p:cNvSpPr/>
+          <p:nvPr/>
+        </p:nvSpPr>
+        <p:spPr>
+          <a:xfrm>
+            <a:off x="6537960" y="2240280"/>
+            <a:ext cx="4572000" cy="3200400"/>
+          </a:xfrm>
+          <a:prstGeom prst="rect">
+            <a:avLst/>
+          </a:prstGeom>
+          <a:noFill/>
+          <a:ln/>
+        </p:spPr>
+        <p:txBody>
+          <a:bodyPr wrap="square" rtlCol="0" anchor="ctr"/>
+          <a:lstStyle/>
+          <a:p>
+            <a:pPr marL="342900" indent="-342900">
+              <a:spcAft>
+                <a:spcPts val="800"/>
+              </a:spcAft>
+              <a:buSzPct val="100000"/>
+              <a:buChar char="•"/>
+            </a:pPr>
+            <a:r>
+              <a:rPr lang="en-US" sz="1350" dirty="0">
+                <a:solidFill>
+                  <a:srgbClr val="F0D8D8"/>
+                </a:solidFill>
+                <a:latin typeface="Calibri" pitchFamily="34" charset="0"/>
+                <a:ea typeface="Calibri" pitchFamily="34" charset="-122"/>
+                <a:cs typeface="Calibri" pitchFamily="34" charset="-120"/>
+              </a:rPr>
+              <a:t>“Wild type is optimal” as an independent finding — it is largely built in</a:t>
+            </a:r>
+            <a:endParaRPr lang="en-US" sz="1350" dirty="0"/>
+          </a:p>
+          <a:p>
+            <a:pPr marL="342900" indent="-342900">
+              <a:spcAft>
+                <a:spcPts val="800"/>
+              </a:spcAft>
+              <a:buSzPct val="100000"/>
+              <a:buChar char="•"/>
+            </a:pPr>
+            <a:r>
+              <a:rPr lang="en-US" sz="1350" dirty="0">
+                <a:solidFill>
+                  <a:srgbClr val="F0D8D8"/>
+                </a:solidFill>
+                <a:latin typeface="Calibri" pitchFamily="34" charset="0"/>
+                <a:ea typeface="Calibri" pitchFamily="34" charset="-122"/>
+                <a:cs typeface="Calibri" pitchFamily="34" charset="-120"/>
+              </a:rPr>
+              <a:t>Absolute strain values, forces, or rupture thresholds</a:t>
+            </a:r>
+            <a:endParaRPr lang="en-US" sz="1350" dirty="0"/>
+          </a:p>
+          <a:p>
+            <a:pPr marL="342900" indent="-342900">
+              <a:spcAft>
+                <a:spcPts val="800"/>
+              </a:spcAft>
+              <a:buSzPct val="100000"/>
+              <a:buChar char="•"/>
+            </a:pPr>
+            <a:r>
+              <a:rPr lang="en-US" sz="1350" dirty="0">
+                <a:solidFill>
+                  <a:srgbClr val="F0D8D8"/>
+                </a:solidFill>
+                <a:latin typeface="Calibri" pitchFamily="34" charset="0"/>
+                <a:ea typeface="Calibri" pitchFamily="34" charset="-122"/>
+                <a:cs typeface="Calibri" pitchFamily="34" charset="-120"/>
+              </a:rPr>
+              <a:t>Any claim about twist, axial gradients or assembly over time</a:t>
+            </a:r>
+            <a:endParaRPr lang="en-US" sz="1350" dirty="0"/>
+          </a:p>
+          <a:p>
+            <a:pPr marL="342900" indent="-342900">
+              <a:spcAft>
+                <a:spcPts val="800"/>
+              </a:spcAft>
+              <a:buSzPct val="100000"/>
+              <a:buChar char="•"/>
+            </a:pPr>
+            <a:r>
+              <a:rPr lang="en-US" sz="1350" dirty="0">
+                <a:solidFill>
+                  <a:srgbClr val="F0D8D8"/>
+                </a:solidFill>
+                <a:latin typeface="Calibri" pitchFamily="34" charset="0"/>
+                <a:ea typeface="Calibri" pitchFamily="34" charset="-122"/>
+                <a:cs typeface="Calibri" pitchFamily="34" charset="-120"/>
+              </a:rPr>
+              <a:t>Precision beyond about 1 nm and a few degrees</a:t>
+            </a:r>
+            <a:endParaRPr lang="en-US" sz="1350" dirty="0"/>
+          </a:p>
+          <a:p>
+            <a:pPr marL="342900" indent="-342900">
+              <a:spcAft>
+                <a:spcPts val="800"/>
+              </a:spcAft>
+              <a:buSzPct val="100000"/>
+              <a:buChar char="•"/>
+            </a:pPr>
+            <a:r>
+              <a:rPr lang="en-US" sz="1350" dirty="0">
+                <a:solidFill>
+                  <a:srgbClr val="F0D8D8"/>
+                </a:solidFill>
+                <a:latin typeface="Calibri" pitchFamily="34" charset="0"/>
+                <a:ea typeface="Calibri" pitchFamily="34" charset="-122"/>
+                <a:cs typeface="Calibri" pitchFamily="34" charset="-120"/>
+              </a:rPr>
+              <a:t>Negative results on questions the 2D geometry cannot represent</a:t>
+            </a:r>
+            <a:endParaRPr lang="en-US" sz="1350" dirty="0"/>
+          </a:p>
+        </p:txBody>
+      </p:sp>
+      <p:sp>
+        <p:nvSpPr>
+          <p:cNvPr id="9" name="Text 7"/>
+          <p:cNvSpPr/>
+          <p:nvPr/>
+        </p:nvSpPr>
+        <p:spPr>
+          <a:xfrm>
+            <a:off x="822960" y="5897880"/>
+            <a:ext cx="10515600" cy="640080"/>
+          </a:xfrm>
+          <a:prstGeom prst="rect">
+            <a:avLst/>
+          </a:prstGeom>
+          <a:noFill/>
+          <a:ln/>
+        </p:spPr>
+        <p:txBody>
+          <a:bodyPr wrap="square" rtlCol="0" anchor="ctr"/>
+          <a:lstStyle/>
+          <a:p>
+            <a:pPr indent="0" marL="0">
+              <a:buNone/>
+            </a:pPr>
+            <a:r>
+              <a:rPr lang="en-US" sz="1500" i="1" dirty="0">
+                <a:solidFill>
+                  <a:srgbClr val="2FA8A8"/>
+                </a:solidFill>
+                <a:latin typeface="Calibri" pitchFamily="34" charset="0"/>
+                <a:ea typeface="Calibri" pitchFamily="34" charset="-122"/>
+                <a:cs typeface="Calibri" pitchFamily="34" charset="-120"/>
+              </a:rPr>
+              <a:t>Bottom line: a well-built hypothesis generator that has not yet been independently validated. Use it to decide what to measure, not to conclude what is true.</a:t>
+            </a:r>
+            <a:endParaRPr lang="en-US" sz="1500" dirty="0"/>
+          </a:p>
+        </p:txBody>
+      </p:sp>
+    </p:spTree>
+  </p:cSld>
+  <p:clrMapOvr>
+    <a:masterClrMapping/>
+  </p:clrMapOvr>
+</p:sld>
+</file>
+
 <file path=ppt/slides/slide2.xml><?xml version="1.0" encoding="utf-8"?>
 <p:sld xmlns:a="http://schemas.openxmlformats.org/drawingml/2006/main" xmlns:r="http://schemas.openxmlformats.org/officeDocument/2006/relationships" xmlns:p="http://schemas.openxmlformats.org/presentationml/2006/main">
   <p:cSld name="Slide 2">
@@ -4264,12 +4861,12 @@
         </p:nvSpPr>
         <p:spPr>
           <a:xfrm>
-            <a:off x="640080" y="1417320"/>
-            <a:ext cx="10881360" cy="1417320"/>
+            <a:off x="640080" y="1371600"/>
+            <a:ext cx="10881360" cy="1078992"/>
           </a:xfrm>
           <a:prstGeom prst="roundRect">
             <a:avLst>
-              <a:gd name="adj" fmla="val 5161"/>
+              <a:gd name="adj" fmla="val 6780"/>
             </a:avLst>
           </a:prstGeom>
           <a:solidFill>
@@ -4291,8 +4888,8 @@
         </p:nvSpPr>
         <p:spPr>
           <a:xfrm>
-            <a:off x="960120" y="1600200"/>
-            <a:ext cx="10058400" cy="384048"/>
+            <a:off x="960120" y="1499616"/>
+            <a:ext cx="10058400" cy="347472"/>
           </a:xfrm>
           <a:prstGeom prst="rect">
             <a:avLst/>
@@ -4308,7 +4905,7 @@
               <a:buNone/>
             </a:pPr>
             <a:r>
-              <a:rPr lang="en-US" sz="1800" b="1" dirty="0">
+              <a:rPr lang="en-US" sz="1700" b="1" dirty="0">
                 <a:solidFill>
                   <a:srgbClr val="8A5A00"/>
                 </a:solidFill>
@@ -4318,7 +4915,7 @@
               </a:rPr>
               <a:t>Joint thresholds are invented</a:t>
             </a:r>
-            <a:endParaRPr lang="en-US" sz="1800" dirty="0"/>
+            <a:endParaRPr lang="en-US" sz="1700" dirty="0"/>
           </a:p>
         </p:txBody>
       </p:sp>
@@ -4330,8 +4927,8 @@
         </p:nvSpPr>
         <p:spPr>
           <a:xfrm>
-            <a:off x="960120" y="2057400"/>
-            <a:ext cx="10058400" cy="731520"/>
+            <a:off x="960120" y="1883664"/>
+            <a:ext cx="10058400" cy="548640"/>
           </a:xfrm>
           <a:prstGeom prst="rect">
             <a:avLst/>
@@ -4347,7 +4944,7 @@
               <a:buNone/>
             </a:pPr>
             <a:r>
-              <a:rPr lang="en-US" sz="1400" dirty="0">
+              <a:rPr lang="en-US" sz="1250" dirty="0">
                 <a:solidFill>
                   <a:srgbClr val="1A1A1A"/>
                 </a:solidFill>
@@ -4357,7 +4954,7 @@
               </a:rPr>
               <a:t>OK / HARD / SEVERE limits were reasoned, not measured. Tested: scaling all bands 0.5×–2× leaves the qualitative conclusion intact, but flips the spoke's label between OK and HARD. So the ranking is robust; the labels are not.</a:t>
             </a:r>
-            <a:endParaRPr lang="en-US" sz="1400" dirty="0"/>
+            <a:endParaRPr lang="en-US" sz="1250" dirty="0"/>
           </a:p>
         </p:txBody>
       </p:sp>
@@ -4369,12 +4966,12 @@
         </p:nvSpPr>
         <p:spPr>
           <a:xfrm>
-            <a:off x="640080" y="2990088"/>
-            <a:ext cx="10881360" cy="1417320"/>
+            <a:off x="640080" y="2578608"/>
+            <a:ext cx="10881360" cy="1078992"/>
           </a:xfrm>
           <a:prstGeom prst="roundRect">
             <a:avLst>
-              <a:gd name="adj" fmla="val 5161"/>
+              <a:gd name="adj" fmla="val 6780"/>
             </a:avLst>
           </a:prstGeom>
           <a:solidFill>
@@ -4396,8 +4993,8 @@
         </p:nvSpPr>
         <p:spPr>
           <a:xfrm>
-            <a:off x="960120" y="3172968"/>
-            <a:ext cx="10058400" cy="384048"/>
+            <a:off x="960120" y="2706624"/>
+            <a:ext cx="10058400" cy="347472"/>
           </a:xfrm>
           <a:prstGeom prst="rect">
             <a:avLst/>
@@ -4413,7 +5010,7 @@
               <a:buNone/>
             </a:pPr>
             <a:r>
-              <a:rPr lang="en-US" sz="1800" b="1" dirty="0">
+              <a:rPr lang="en-US" sz="1700" b="1" dirty="0">
                 <a:solidFill>
                   <a:srgbClr val="8A5A00"/>
                 </a:solidFill>
@@ -4423,7 +5020,7 @@
               </a:rPr>
               <a:t>Bond strengths are ordinal</a:t>
             </a:r>
-            <a:endParaRPr lang="en-US" sz="1800" dirty="0"/>
+            <a:endParaRPr lang="en-US" sz="1700" dirty="0"/>
           </a:p>
         </p:txBody>
       </p:sp>
@@ -4435,8 +5032,8 @@
         </p:nvSpPr>
         <p:spPr>
           <a:xfrm>
-            <a:off x="960120" y="3630168"/>
-            <a:ext cx="10058400" cy="731520"/>
+            <a:off x="960120" y="3090672"/>
+            <a:ext cx="10058400" cy="548640"/>
           </a:xfrm>
           <a:prstGeom prst="rect">
             <a:avLst/>
@@ -4452,7 +5049,7 @@
               <a:buNone/>
             </a:pPr>
             <a:r>
-              <a:rPr lang="en-US" sz="1400" dirty="0">
+              <a:rPr lang="en-US" sz="1250" dirty="0">
                 <a:solidFill>
                   <a:srgbClr val="1A1A1A"/>
                 </a:solidFill>
@@ -4462,7 +5059,7 @@
               </a:rPr>
               <a:t>Six bonds carry values from 1.00 to 0.25 encoding only a rank order. The model then reports a specific “closest to rupture” bond and a numeric load. That precision is not supported by the input — only the ordering is.</a:t>
             </a:r>
-            <a:endParaRPr lang="en-US" sz="1400" dirty="0"/>
+            <a:endParaRPr lang="en-US" sz="1250" dirty="0"/>
           </a:p>
         </p:txBody>
       </p:sp>
@@ -4474,12 +5071,12 @@
         </p:nvSpPr>
         <p:spPr>
           <a:xfrm>
-            <a:off x="640080" y="4562856"/>
-            <a:ext cx="10881360" cy="1417320"/>
+            <a:off x="640080" y="3785616"/>
+            <a:ext cx="10881360" cy="1078992"/>
           </a:xfrm>
           <a:prstGeom prst="roundRect">
             <a:avLst>
-              <a:gd name="adj" fmla="val 5161"/>
+              <a:gd name="adj" fmla="val 6780"/>
             </a:avLst>
           </a:prstGeom>
           <a:solidFill>
@@ -4501,8 +5098,8 @@
         </p:nvSpPr>
         <p:spPr>
           <a:xfrm>
-            <a:off x="960120" y="4745736"/>
-            <a:ext cx="10058400" cy="384048"/>
+            <a:off x="960120" y="3913632"/>
+            <a:ext cx="10058400" cy="347472"/>
           </a:xfrm>
           <a:prstGeom prst="rect">
             <a:avLst/>
@@ -4518,7 +5115,7 @@
               <a:buNone/>
             </a:pPr>
             <a:r>
-              <a:rPr lang="en-US" sz="1800" b="1" dirty="0">
+              <a:rPr lang="en-US" sz="1700" b="1" dirty="0">
                 <a:solidFill>
                   <a:srgbClr val="8A5A00"/>
                 </a:solidFill>
@@ -4528,7 +5125,7 @@
               </a:rPr>
               <a:t>No absolute energy scale</a:t>
             </a:r>
-            <a:endParaRPr lang="en-US" sz="1800" dirty="0"/>
+            <a:endParaRPr lang="en-US" sz="1700" dirty="0"/>
           </a:p>
         </p:txBody>
       </p:sp>
@@ -4540,8 +5137,8 @@
         </p:nvSpPr>
         <p:spPr>
           <a:xfrm>
-            <a:off x="960120" y="5202936"/>
-            <a:ext cx="10058400" cy="731520"/>
+            <a:off x="960120" y="4297680"/>
+            <a:ext cx="10058400" cy="548640"/>
           </a:xfrm>
           <a:prstGeom prst="rect">
             <a:avLst/>
@@ -4557,7 +5154,7 @@
               <a:buNone/>
             </a:pPr>
             <a:r>
-              <a:rPr lang="en-US" sz="1400" dirty="0">
+              <a:rPr lang="en-US" sz="1250" dirty="0">
                 <a:solidFill>
                   <a:srgbClr val="1A1A1A"/>
                 </a:solidFill>
@@ -4567,13 +5164,118 @@
               </a:rPr>
               <a:t>Without bond energies in kT, nothing converts to a predicted fluctuation amplitude comparable with data. This is exactly what made the soft-mode analysis uninterpretable and led to it being abandoned.</a:t>
             </a:r>
-            <a:endParaRPr lang="en-US" sz="1400" dirty="0"/>
-          </a:p>
-        </p:txBody>
-      </p:sp>
-      <p:sp>
-        <p:nvSpPr>
-          <p:cNvPr id="13" name="Text 11"/>
+            <a:endParaRPr lang="en-US" sz="1250" dirty="0"/>
+          </a:p>
+        </p:txBody>
+      </p:sp>
+      <p:sp>
+        <p:nvSpPr>
+          <p:cNvPr id="13" name="Shape 11"/>
+          <p:cNvSpPr/>
+          <p:nvPr/>
+        </p:nvSpPr>
+        <p:spPr>
+          <a:xfrm>
+            <a:off x="640080" y="4992624"/>
+            <a:ext cx="10881360" cy="1078992"/>
+          </a:xfrm>
+          <a:prstGeom prst="roundRect">
+            <a:avLst>
+              <a:gd name="adj" fmla="val 6780"/>
+            </a:avLst>
+          </a:prstGeom>
+          <a:solidFill>
+            <a:srgbClr val="FFF8E1"/>
+          </a:solidFill>
+          <a:ln w="12700">
+            <a:solidFill>
+              <a:srgbClr val="FFF8E1"/>
+            </a:solidFill>
+            <a:prstDash val="solid"/>
+          </a:ln>
+        </p:spPr>
+      </p:sp>
+      <p:sp>
+        <p:nvSpPr>
+          <p:cNvPr id="14" name="Text 12"/>
+          <p:cNvSpPr/>
+          <p:nvPr/>
+        </p:nvSpPr>
+        <p:spPr>
+          <a:xfrm>
+            <a:off x="960120" y="5120640"/>
+            <a:ext cx="10058400" cy="347472"/>
+          </a:xfrm>
+          <a:prstGeom prst="rect">
+            <a:avLst/>
+          </a:prstGeom>
+          <a:noFill/>
+          <a:ln/>
+        </p:spPr>
+        <p:txBody>
+          <a:bodyPr wrap="square" lIns="0" tIns="0" rIns="0" bIns="0" rtlCol="0" anchor="ctr"/>
+          <a:lstStyle/>
+          <a:p>
+            <a:pPr indent="0" marL="0">
+              <a:buNone/>
+            </a:pPr>
+            <a:r>
+              <a:rPr lang="en-US" sz="1700" b="1" dirty="0">
+                <a:solidFill>
+                  <a:srgbClr val="8A5A00"/>
+                </a:solidFill>
+                <a:latin typeface="Cambria" pitchFamily="34" charset="0"/>
+                <a:ea typeface="Cambria" pitchFamily="34" charset="-122"/>
+                <a:cs typeface="Cambria" pitchFamily="34" charset="-120"/>
+              </a:rPr>
+              <a:t>Strand thickness is assumed</a:t>
+            </a:r>
+            <a:endParaRPr lang="en-US" sz="1700" dirty="0"/>
+          </a:p>
+        </p:txBody>
+      </p:sp>
+      <p:sp>
+        <p:nvSpPr>
+          <p:cNvPr id="15" name="Text 13"/>
+          <p:cNvSpPr/>
+          <p:nvPr/>
+        </p:nvSpPr>
+        <p:spPr>
+          <a:xfrm>
+            <a:off x="960120" y="5504688"/>
+            <a:ext cx="10058400" cy="548640"/>
+          </a:xfrm>
+          <a:prstGeom prst="rect">
+            <a:avLst/>
+          </a:prstGeom>
+          <a:noFill/>
+          <a:ln/>
+        </p:spPr>
+        <p:txBody>
+          <a:bodyPr wrap="square" lIns="0" tIns="0" rIns="0" bIns="0" rtlCol="0" anchor="ctr"/>
+          <a:lstStyle/>
+          <a:p>
+            <a:pPr indent="0" marL="0">
+              <a:buNone/>
+            </a:pPr>
+            <a:r>
+              <a:rPr lang="en-US" sz="1250" dirty="0">
+                <a:solidFill>
+                  <a:srgbClr val="1A1A1A"/>
+                </a:solidFill>
+                <a:latin typeface="Calibri" pitchFamily="34" charset="0"/>
+                <a:ea typeface="Calibri" pitchFamily="34" charset="-122"/>
+                <a:cs typeface="Calibri" pitchFamily="34" charset="-120"/>
+              </a:rPr>
+              <a:t>Clearance and the steric term count a 1 nm strand half-width that was never measured — deliberately not fitted, since tuning it to match a mutant diameter would make the result restate the input. Any clearance within a few tenths of zero is therefore marginal. The companion reachability test needs no such number and is the firmer of the two.</a:t>
+            </a:r>
+            <a:endParaRPr lang="en-US" sz="1250" dirty="0"/>
+          </a:p>
+        </p:txBody>
+      </p:sp>
+      <p:sp>
+        <p:nvSpPr>
+          <p:cNvPr id="16" name="Text 14"/>
           <p:cNvSpPr/>
           <p:nvPr/>
         </p:nvSpPr>
@@ -4721,8 +5423,8 @@
         </p:nvSpPr>
         <p:spPr>
           <a:xfrm>
-            <a:off x="640080" y="1325880"/>
-            <a:ext cx="10881360" cy="365760"/>
+            <a:off x="640080" y="1298448"/>
+            <a:ext cx="10881360" cy="502920"/>
           </a:xfrm>
           <a:prstGeom prst="rect">
             <a:avLst/>
@@ -4738,7 +5440,7 @@
               <a:buNone/>
             </a:pPr>
             <a:r>
-              <a:rPr lang="en-US" sz="1500" dirty="0">
+              <a:rPr lang="en-US" sz="1450" dirty="0">
                 <a:solidFill>
                   <a:srgbClr val="6B7280"/>
                 </a:solidFill>
@@ -4746,9 +5448,9 @@
                 <a:ea typeface="Calibri" pitchFamily="34" charset="-122"/>
                 <a:cs typeface="Calibri" pitchFamily="34" charset="-120"/>
               </a:rPr>
-              <a:t>Solve cost is driven by convergence difficulty, not problem size — so it is unpredictable:</a:t>
-            </a:r>
-            <a:endParaRPr lang="en-US" sz="1500" dirty="0"/>
+              <a:t>Timings are no longer the problem — the chain solver and a vectorised steric test brought every configuration under three seconds. What remains is that robustness had to be added, not designed in:</a:t>
+            </a:r>
+            <a:endParaRPr lang="en-US" sz="1450" dirty="0"/>
           </a:p>
         </p:txBody>
       </p:sp>
@@ -4759,8 +5461,8 @@
           <p:nvPr/>
         </p:nvGraphicFramePr>
         <p:xfrm>
-          <a:off x="640080" y="1828800"/>
-          <a:ext cx="5120640" cy="2926080"/>
+          <a:off x="640080" y="1874520"/>
+          <a:ext cx="5120640" cy="2834640"/>
         </p:xfrm>
         <a:graphic xmlns:a="http://schemas.openxmlformats.org/drawingml/2006/main">
           <a:graphicData uri="http://schemas.openxmlformats.org/drawingml/2006/chart">
@@ -4793,17 +5495,17 @@
               <a:buNone/>
             </a:pPr>
             <a:r>
-              <a:rPr lang="en-US" sz="1500" b="1" dirty="0">
-                <a:solidFill>
-                  <a:srgbClr val="D97706"/>
+              <a:rPr lang="en-US" sz="1450" b="1" dirty="0">
+                <a:solidFill>
+                  <a:srgbClr val="C62828"/>
                 </a:solidFill>
                 <a:latin typeface="Calibri" pitchFamily="34" charset="0"/>
                 <a:ea typeface="Calibri" pitchFamily="34" charset="-122"/>
                 <a:cs typeface="Calibri" pitchFamily="34" charset="-120"/>
               </a:rPr>
-              <a:t>Some inputs never converge</a:t>
-            </a:r>
-            <a:endParaRPr lang="en-US" sz="1500" dirty="0"/>
+              <a:t>A crash reachable from the interface</a:t>
+            </a:r>
+            <a:endParaRPr lang="en-US" sz="1450" dirty="0"/>
           </a:p>
         </p:txBody>
       </p:sp>
@@ -4816,7 +5518,7 @@
         <p:spPr>
           <a:xfrm>
             <a:off x="6035040" y="2157984"/>
-            <a:ext cx="5486400" cy="685800"/>
+            <a:ext cx="5486400" cy="822960"/>
           </a:xfrm>
           <a:prstGeom prst="rect">
             <a:avLst/>
@@ -4832,7 +5534,7 @@
               <a:buNone/>
             </a:pPr>
             <a:r>
-              <a:rPr lang="en-US" sz="1300" dirty="0">
+              <a:rPr lang="en-US" sz="1250" dirty="0">
                 <a:solidFill>
                   <a:srgbClr val="1A1A1A"/>
                 </a:solidFill>
@@ -4840,9 +5542,9 @@
                 <a:ea typeface="Calibri" pitchFamily="34" charset="-122"/>
                 <a:cs typeface="Calibri" pitchFamily="34" charset="-120"/>
               </a:rPr>
-              <a:t>n_pf_A = 20 fails outright. Non-convergence is now surfaced, but the geometry is still drawn and every metric still reported.</a:t>
-            </a:r>
-            <a:endParaRPr lang="en-US" sz="1300" dirty="0"/>
+              <a:t>A singlet centriole at a shifted register made the trust-region step's dense factorisation fail outright. It now retries iteratively, but it was reachable by two clicks and nothing had caught it.</a:t>
+            </a:r>
+            <a:endParaRPr lang="en-US" sz="1250" dirty="0"/>
           </a:p>
         </p:txBody>
       </p:sp>
@@ -4854,7 +5556,7 @@
         </p:nvSpPr>
         <p:spPr>
           <a:xfrm>
-            <a:off x="6035040" y="2880360"/>
+            <a:off x="6035040" y="2999232"/>
             <a:ext cx="5486400" cy="347472"/>
           </a:xfrm>
           <a:prstGeom prst="rect">
@@ -4871,17 +5573,17 @@
               <a:buNone/>
             </a:pPr>
             <a:r>
-              <a:rPr lang="en-US" sz="1500" b="1" dirty="0">
-                <a:solidFill>
-                  <a:srgbClr val="D97706"/>
+              <a:rPr lang="en-US" sz="1450" b="1" dirty="0">
+                <a:solidFill>
+                  <a:srgbClr val="C62828"/>
                 </a:solidFill>
                 <a:latin typeface="Calibri" pitchFamily="34" charset="0"/>
                 <a:ea typeface="Calibri" pitchFamily="34" charset="-122"/>
                 <a:cs typeface="Calibri" pitchFamily="34" charset="-120"/>
               </a:rPr>
-              <a:t>Accuracy was traded for responsiveness</a:t>
-            </a:r>
-            <a:endParaRPr lang="en-US" sz="1500" dirty="0"/>
+              <a:t>An expectation was wrong, then the correction went stale too</a:t>
+            </a:r>
+            <a:endParaRPr lang="en-US" sz="1450" dirty="0"/>
           </a:p>
         </p:txBody>
       </p:sp>
@@ -4893,8 +5595,8 @@
         </p:nvSpPr>
         <p:spPr>
           <a:xfrm>
-            <a:off x="6035040" y="3209544"/>
-            <a:ext cx="5486400" cy="685800"/>
+            <a:off x="6035040" y="3328416"/>
+            <a:ext cx="5486400" cy="822960"/>
           </a:xfrm>
           <a:prstGeom prst="rect">
             <a:avLst/>
@@ -4910,7 +5612,7 @@
               <a:buNone/>
             </a:pPr>
             <a:r>
-              <a:rPr lang="en-US" sz="1300" dirty="0">
+              <a:rPr lang="en-US" sz="1250" dirty="0">
                 <a:solidFill>
                   <a:srgbClr val="1A1A1A"/>
                 </a:solidFill>
@@ -4918,9 +5620,9 @@
                 <a:ea typeface="Calibri" pitchFamily="34" charset="-122"/>
                 <a:cs typeface="Calibri" pitchFamily="34" charset="-120"/>
               </a:rPr>
-              <a:t>Solver effort is capped in the interface so it cannot stall. Extreme configurations therefore return lower-confidence answers by design.</a:t>
-            </a:r>
-            <a:endParaRPr lang="en-US" sz="1300" dirty="0"/>
+              <a:t>Clashes were first predicted at extreme protofilament counts, then 'tested: zero clashes 9 through 18'. Under the current solver n_pf = 9 and 18 both clash again. The original expectation was right; the correction had simply been measured on a superseded architecture.</a:t>
+            </a:r>
+            <a:endParaRPr lang="en-US" sz="1250" dirty="0"/>
           </a:p>
         </p:txBody>
       </p:sp>
@@ -4932,7 +5634,7 @@
         </p:nvSpPr>
         <p:spPr>
           <a:xfrm>
-            <a:off x="6035040" y="3931920"/>
+            <a:off x="6035040" y="4169664"/>
             <a:ext cx="5486400" cy="347472"/>
           </a:xfrm>
           <a:prstGeom prst="rect">
@@ -4949,7 +5651,7 @@
               <a:buNone/>
             </a:pPr>
             <a:r>
-              <a:rPr lang="en-US" sz="1500" b="1" dirty="0">
+              <a:rPr lang="en-US" sz="1450" b="1" dirty="0">
                 <a:solidFill>
                   <a:srgbClr val="D97706"/>
                 </a:solidFill>
@@ -4957,9 +5659,9 @@
                 <a:ea typeface="Calibri" pitchFamily="34" charset="-122"/>
                 <a:cs typeface="Calibri" pitchFamily="34" charset="-120"/>
               </a:rPr>
-              <a:t>An earlier expectation was simply wrong</a:t>
-            </a:r>
-            <a:endParaRPr lang="en-US" sz="1500" dirty="0"/>
+              <a:t>Accuracy is still traded for responsiveness</a:t>
+            </a:r>
+            <a:endParaRPr lang="en-US" sz="1450" dirty="0"/>
           </a:p>
         </p:txBody>
       </p:sp>
@@ -4971,8 +5673,8 @@
         </p:nvSpPr>
         <p:spPr>
           <a:xfrm>
-            <a:off x="6035040" y="4261104"/>
-            <a:ext cx="5486400" cy="685800"/>
+            <a:off x="6035040" y="4498848"/>
+            <a:ext cx="5486400" cy="822960"/>
           </a:xfrm>
           <a:prstGeom prst="rect">
             <a:avLst/>
@@ -4988,7 +5690,7 @@
               <a:buNone/>
             </a:pPr>
             <a:r>
-              <a:rPr lang="en-US" sz="1300" dirty="0">
+              <a:rPr lang="en-US" sz="1250" dirty="0">
                 <a:solidFill>
                   <a:srgbClr val="1A1A1A"/>
                 </a:solidFill>
@@ -4996,9 +5698,9 @@
                 <a:ea typeface="Calibri" pitchFamily="34" charset="-122"/>
                 <a:cs typeface="Calibri" pitchFamily="34" charset="-120"/>
               </a:rPr>
-              <a:t>Clashes were predicted at low protofilament counts. Tested 9 through 18: zero clashes at every value. The claim came from a superseded architecture and had not been rechecked.</a:t>
-            </a:r>
-            <a:endParaRPr lang="en-US" sz="1300" dirty="0"/>
+              <a:t>Solver effort is capped in the interface so it cannot stall, so extreme configurations return lower-confidence answers by design.</a:t>
+            </a:r>
+            <a:endParaRPr lang="en-US" sz="1250" dirty="0"/>
           </a:p>
         </p:txBody>
       </p:sp>
@@ -5011,7 +5713,7 @@
         <p:spPr>
           <a:xfrm>
             <a:off x="640080" y="5120640"/>
-            <a:ext cx="10881360" cy="365760"/>
+            <a:ext cx="10881360" cy="457200"/>
           </a:xfrm>
           <a:prstGeom prst="rect">
             <a:avLst/>
@@ -5035,7 +5737,7 @@
                 <a:ea typeface="Calibri" pitchFamily="34" charset="-122"/>
                 <a:cs typeface="Calibri" pitchFamily="34" charset="-120"/>
               </a:rPr>
-              <a:t>The last point is the important one: a stated result survived an architecture change without being re-tested.</a:t>
+              <a:t>The middle point is the one to sit with: a stated result survived an architecture change without being re-tested — and so did the correction that replaced it. Numbers in slides decay silently.</a:t>
             </a:r>
             <a:endParaRPr lang="en-US" sz="1400" dirty="0"/>
           </a:p>
@@ -5099,7 +5801,7 @@
                 <a:ea typeface="Calibri" pitchFamily="34" charset="-122"/>
                 <a:cs typeface="Calibri" pitchFamily="34" charset="-120"/>
               </a:rPr>
-              <a:t>BEFORE PUBLICATION</a:t>
+              <a:t>WORKED EXAMPLE</a:t>
             </a:r>
             <a:endParaRPr lang="en-US" sz="1200" dirty="0"/>
           </a:p>
@@ -5138,6 +5840,502 @@
                 <a:ea typeface="Cambria" pitchFamily="34" charset="-122"/>
                 <a:cs typeface="Cambria" pitchFamily="34" charset="-120"/>
               </a:rPr>
+              <a:t>Case study: a result that was wrong for two years' worth of reasons</a:t>
+            </a:r>
+            <a:endParaRPr lang="en-US" sz="3400" dirty="0"/>
+          </a:p>
+        </p:txBody>
+      </p:sp>
+      <p:sp>
+        <p:nvSpPr>
+          <p:cNvPr id="4" name="Text 2"/>
+          <p:cNvSpPr/>
+          <p:nvPr/>
+        </p:nvSpPr>
+        <p:spPr>
+          <a:xfrm>
+            <a:off x="640080" y="1188720"/>
+            <a:ext cx="10881360" cy="457200"/>
+          </a:xfrm>
+          <a:prstGeom prst="rect">
+            <a:avLst/>
+          </a:prstGeom>
+          <a:noFill/>
+          <a:ln/>
+        </p:spPr>
+        <p:txBody>
+          <a:bodyPr wrap="square" rtlCol="0" anchor="ctr"/>
+          <a:lstStyle/>
+          <a:p>
+            <a:pPr indent="0" marL="0">
+              <a:buNone/>
+            </a:pPr>
+            <a:r>
+              <a:rPr lang="en-US" sz="1450" dirty="0">
+                <a:solidFill>
+                  <a:srgbClr val="6B7280"/>
+                </a:solidFill>
+                <a:latin typeface="Calibri" pitchFamily="34" charset="0"/>
+                <a:ea typeface="Calibri" pitchFamily="34" charset="-122"/>
+                <a:cs typeface="Calibri" pitchFamily="34" charset="-120"/>
+              </a:rPr>
+              <a:t>The register search was used to argue a published-quality conclusion about a measured mutant. Two defects in it were found only when the drawing was questioned — not by any test.</a:t>
+            </a:r>
+            <a:endParaRPr lang="en-US" sz="1450" dirty="0"/>
+          </a:p>
+        </p:txBody>
+      </p:sp>
+      <p:sp>
+        <p:nvSpPr>
+          <p:cNvPr id="5" name="Shape 3"/>
+          <p:cNvSpPr/>
+          <p:nvPr/>
+        </p:nvSpPr>
+        <p:spPr>
+          <a:xfrm>
+            <a:off x="640080" y="1783080"/>
+            <a:ext cx="10881360" cy="1325880"/>
+          </a:xfrm>
+          <a:prstGeom prst="roundRect">
+            <a:avLst>
+              <a:gd name="adj" fmla="val 5517"/>
+            </a:avLst>
+          </a:prstGeom>
+          <a:solidFill>
+            <a:srgbClr val="FFEBEE"/>
+          </a:solidFill>
+          <a:ln w="12700">
+            <a:solidFill>
+              <a:srgbClr val="FFEBEE"/>
+            </a:solidFill>
+            <a:prstDash val="solid"/>
+          </a:ln>
+        </p:spPr>
+      </p:sp>
+      <p:sp>
+        <p:nvSpPr>
+          <p:cNvPr id="6" name="Text 4"/>
+          <p:cNvSpPr/>
+          <p:nvPr/>
+        </p:nvSpPr>
+        <p:spPr>
+          <a:xfrm>
+            <a:off x="960120" y="1929384"/>
+            <a:ext cx="10058400" cy="365760"/>
+          </a:xfrm>
+          <a:prstGeom prst="rect">
+            <a:avLst/>
+          </a:prstGeom>
+          <a:noFill/>
+          <a:ln/>
+        </p:spPr>
+        <p:txBody>
+          <a:bodyPr wrap="square" lIns="0" tIns="0" rIns="0" bIns="0" rtlCol="0" anchor="ctr"/>
+          <a:lstStyle/>
+          <a:p>
+            <a:pPr indent="0" marL="0">
+              <a:buNone/>
+            </a:pPr>
+            <a:r>
+              <a:rPr lang="en-US" sz="1600" b="1" dirty="0">
+                <a:solidFill>
+                  <a:srgbClr val="8E1B1B"/>
+                </a:solidFill>
+                <a:latin typeface="Cambria" pitchFamily="34" charset="0"/>
+                <a:ea typeface="Cambria" pitchFamily="34" charset="-122"/>
+                <a:cs typeface="Cambria" pitchFamily="34" charset="-120"/>
+              </a:rPr>
+              <a:t>Rest angles were not re-referenced when the register shifted</a:t>
+            </a:r>
+            <a:endParaRPr lang="en-US" sz="1600" dirty="0"/>
+          </a:p>
+        </p:txBody>
+      </p:sp>
+      <p:sp>
+        <p:nvSpPr>
+          <p:cNvPr id="7" name="Text 5"/>
+          <p:cNvSpPr/>
+          <p:nvPr/>
+        </p:nvSpPr>
+        <p:spPr>
+          <a:xfrm>
+            <a:off x="960120" y="2331720"/>
+            <a:ext cx="10058400" cy="713232"/>
+          </a:xfrm>
+          <a:prstGeom prst="rect">
+            <a:avLst/>
+          </a:prstGeom>
+          <a:noFill/>
+          <a:ln/>
+        </p:spPr>
+        <p:txBody>
+          <a:bodyPr wrap="square" lIns="0" tIns="0" rIns="0" bIns="0" rtlCol="0" anchor="ctr"/>
+          <a:lstStyle/>
+          <a:p>
+            <a:pPr indent="0" marL="0">
+              <a:buNone/>
+            </a:pPr>
+            <a:r>
+              <a:rPr lang="en-US" sz="1250" dirty="0">
+                <a:solidFill>
+                  <a:srgbClr val="1A1A1A"/>
+                </a:solidFill>
+                <a:latin typeface="Calibri" pitchFamily="34" charset="0"/>
+                <a:ea typeface="Calibri" pitchFamily="34" charset="-122"/>
+                <a:cs typeface="Calibri" pitchFamily="34" charset="-120"/>
+              </a:rPr>
+              <a:t>Contact rest orientations are measured in the tubule's own frame. Sliding a contact by one protofilament rotates the site by 360/13 = 27.7° in that frame, but the rest angle stayed put. Every shifted candidate was charged 27.7° of strain that did not exist — past the 20° HARD limit before anything moved. The ranking was bookkeeping.</a:t>
+            </a:r>
+            <a:endParaRPr lang="en-US" sz="1250" dirty="0"/>
+          </a:p>
+        </p:txBody>
+      </p:sp>
+      <p:sp>
+        <p:nvSpPr>
+          <p:cNvPr id="8" name="Shape 6"/>
+          <p:cNvSpPr/>
+          <p:nvPr/>
+        </p:nvSpPr>
+        <p:spPr>
+          <a:xfrm>
+            <a:off x="640080" y="3246120"/>
+            <a:ext cx="10881360" cy="1325880"/>
+          </a:xfrm>
+          <a:prstGeom prst="roundRect">
+            <a:avLst>
+              <a:gd name="adj" fmla="val 5517"/>
+            </a:avLst>
+          </a:prstGeom>
+          <a:solidFill>
+            <a:srgbClr val="FFEBEE"/>
+          </a:solidFill>
+          <a:ln w="12700">
+            <a:solidFill>
+              <a:srgbClr val="FFEBEE"/>
+            </a:solidFill>
+            <a:prstDash val="solid"/>
+          </a:ln>
+        </p:spPr>
+      </p:sp>
+      <p:sp>
+        <p:nvSpPr>
+          <p:cNvPr id="9" name="Text 7"/>
+          <p:cNvSpPr/>
+          <p:nvPr/>
+        </p:nvSpPr>
+        <p:spPr>
+          <a:xfrm>
+            <a:off x="960120" y="3392424"/>
+            <a:ext cx="10058400" cy="365760"/>
+          </a:xfrm>
+          <a:prstGeom prst="rect">
+            <a:avLst/>
+          </a:prstGeom>
+          <a:noFill/>
+          <a:ln/>
+        </p:spPr>
+        <p:txBody>
+          <a:bodyPr wrap="square" lIns="0" tIns="0" rIns="0" bIns="0" rtlCol="0" anchor="ctr"/>
+          <a:lstStyle/>
+          <a:p>
+            <a:pPr indent="0" marL="0">
+              <a:buNone/>
+            </a:pPr>
+            <a:r>
+              <a:rPr lang="en-US" sz="1600" b="1" dirty="0">
+                <a:solidFill>
+                  <a:srgbClr val="8E1B1B"/>
+                </a:solidFill>
+                <a:latin typeface="Cambria" pitchFamily="34" charset="0"/>
+                <a:ea typeface="Cambria" pitchFamily="34" charset="-122"/>
+                <a:cs typeface="Cambria" pitchFamily="34" charset="-120"/>
+              </a:rPr>
+              <a:t>Nothing stopped a strand lying inside a microtubule</a:t>
+            </a:r>
+            <a:endParaRPr lang="en-US" sz="1600" dirty="0"/>
+          </a:p>
+        </p:txBody>
+      </p:sp>
+      <p:sp>
+        <p:nvSpPr>
+          <p:cNvPr id="10" name="Text 8"/>
+          <p:cNvSpPr/>
+          <p:nvPr/>
+        </p:nvSpPr>
+        <p:spPr>
+          <a:xfrm>
+            <a:off x="960120" y="3794760"/>
+            <a:ext cx="10058400" cy="713232"/>
+          </a:xfrm>
+          <a:prstGeom prst="rect">
+            <a:avLst/>
+          </a:prstGeom>
+          <a:noFill/>
+          <a:ln/>
+        </p:spPr>
+        <p:txBody>
+          <a:bodyPr wrap="square" lIns="0" tIns="0" rIns="0" bIns="0" rtlCol="0" anchor="ctr"/>
+          <a:lstStyle/>
+          <a:p>
+            <a:pPr indent="0" marL="0">
+              <a:buNone/>
+            </a:pPr>
+            <a:r>
+              <a:rPr lang="en-US" sz="1250" dirty="0">
+                <a:solidFill>
+                  <a:srgbClr val="1A1A1A"/>
+                </a:solidFill>
+                <a:latin typeface="Calibri" pitchFamily="34" charset="0"/>
+                <a:ea typeface="Calibri" pitchFamily="34" charset="-122"/>
+                <a:cs typeface="Calibri" pitchFamily="34" charset="-120"/>
+              </a:rPr>
+              <a:t>Penetration was measured but never entered the objective, and the measurement itself discarded 3 nm from both ends of every segment — over half of an 11.6 nm linker arm, including exactly the stretch where a bad register shows. The search's winner reached its site 1.7° above tangential, straight along the tubule wall.</a:t>
+            </a:r>
+            <a:endParaRPr lang="en-US" sz="1250" dirty="0"/>
+          </a:p>
+        </p:txBody>
+      </p:sp>
+      <p:sp>
+        <p:nvSpPr>
+          <p:cNvPr id="11" name="Shape 9"/>
+          <p:cNvSpPr/>
+          <p:nvPr/>
+        </p:nvSpPr>
+        <p:spPr>
+          <a:xfrm>
+            <a:off x="640080" y="4709160"/>
+            <a:ext cx="10881360" cy="1325880"/>
+          </a:xfrm>
+          <a:prstGeom prst="roundRect">
+            <a:avLst>
+              <a:gd name="adj" fmla="val 5517"/>
+            </a:avLst>
+          </a:prstGeom>
+          <a:solidFill>
+            <a:srgbClr val="FFF8E1"/>
+          </a:solidFill>
+          <a:ln w="12700">
+            <a:solidFill>
+              <a:srgbClr val="FFF8E1"/>
+            </a:solidFill>
+            <a:prstDash val="solid"/>
+          </a:ln>
+        </p:spPr>
+      </p:sp>
+      <p:sp>
+        <p:nvSpPr>
+          <p:cNvPr id="12" name="Text 10"/>
+          <p:cNvSpPr/>
+          <p:nvPr/>
+        </p:nvSpPr>
+        <p:spPr>
+          <a:xfrm>
+            <a:off x="960120" y="4855464"/>
+            <a:ext cx="10058400" cy="365760"/>
+          </a:xfrm>
+          <a:prstGeom prst="rect">
+            <a:avLst/>
+          </a:prstGeom>
+          <a:noFill/>
+          <a:ln/>
+        </p:spPr>
+        <p:txBody>
+          <a:bodyPr wrap="square" lIns="0" tIns="0" rIns="0" bIns="0" rtlCol="0" anchor="ctr"/>
+          <a:lstStyle/>
+          <a:p>
+            <a:pPr indent="0" marL="0">
+              <a:buNone/>
+            </a:pPr>
+            <a:r>
+              <a:rPr lang="en-US" sz="1600" b="1" dirty="0">
+                <a:solidFill>
+                  <a:srgbClr val="8A5A00"/>
+                </a:solidFill>
+                <a:latin typeface="Cambria" pitchFamily="34" charset="0"/>
+                <a:ea typeface="Cambria" pitchFamily="34" charset="-122"/>
+                <a:cs typeface="Cambria" pitchFamily="34" charset="-120"/>
+              </a:rPr>
+              <a:t>What it cost</a:t>
+            </a:r>
+            <a:endParaRPr lang="en-US" sz="1600" dirty="0"/>
+          </a:p>
+        </p:txBody>
+      </p:sp>
+      <p:sp>
+        <p:nvSpPr>
+          <p:cNvPr id="13" name="Text 11"/>
+          <p:cNvSpPr/>
+          <p:nvPr/>
+        </p:nvSpPr>
+        <p:spPr>
+          <a:xfrm>
+            <a:off x="960120" y="5257800"/>
+            <a:ext cx="10058400" cy="713232"/>
+          </a:xfrm>
+          <a:prstGeom prst="rect">
+            <a:avLst/>
+          </a:prstGeom>
+          <a:noFill/>
+          <a:ln/>
+        </p:spPr>
+        <p:txBody>
+          <a:bodyPr wrap="square" lIns="0" tIns="0" rIns="0" bIns="0" rtlCol="0" anchor="ctr"/>
+          <a:lstStyle/>
+          <a:p>
+            <a:pPr indent="0" marL="0">
+              <a:buNone/>
+            </a:pPr>
+            <a:r>
+              <a:rPr lang="en-US" sz="1250" dirty="0">
+                <a:solidFill>
+                  <a:srgbClr val="1A1A1A"/>
+                </a:solidFill>
+                <a:latin typeface="Calibri" pitchFamily="34" charset="0"/>
+                <a:ea typeface="Calibri" pitchFamily="34" charset="-122"/>
+                <a:cs typeface="Calibri" pitchFamily="34" charset="-120"/>
+              </a:rPr>
+              <a:t>The register that reproduced the measured diameter, and the mechanism built on it, sits at or past the edge of what is geometrically reachable. The prediction in the project's own notes had to be withdrawn and rewritten.</a:t>
+            </a:r>
+            <a:endParaRPr lang="en-US" sz="1250" dirty="0"/>
+          </a:p>
+        </p:txBody>
+      </p:sp>
+      <p:sp>
+        <p:nvSpPr>
+          <p:cNvPr id="14" name="Text 12"/>
+          <p:cNvSpPr/>
+          <p:nvPr/>
+        </p:nvSpPr>
+        <p:spPr>
+          <a:xfrm>
+            <a:off x="640080" y="6263640"/>
+            <a:ext cx="10881360" cy="411480"/>
+          </a:xfrm>
+          <a:prstGeom prst="rect">
+            <a:avLst/>
+          </a:prstGeom>
+          <a:noFill/>
+          <a:ln/>
+        </p:spPr>
+        <p:txBody>
+          <a:bodyPr wrap="square" rtlCol="0" anchor="ctr"/>
+          <a:lstStyle/>
+          <a:p>
+            <a:pPr indent="0" marL="0">
+              <a:buNone/>
+            </a:pPr>
+            <a:r>
+              <a:rPr lang="en-US" sz="1400" i="1" dirty="0">
+                <a:solidFill>
+                  <a:srgbClr val="C62828"/>
+                </a:solidFill>
+                <a:latin typeface="Calibri" pitchFamily="34" charset="0"/>
+                <a:ea typeface="Calibri" pitchFamily="34" charset="-122"/>
+                <a:cs typeface="Calibri" pitchFamily="34" charset="-120"/>
+              </a:rPr>
+              <a:t>Neither defect made anything crash, and neither showed up in any number the tool printed. They surfaced because a picture looked wrong. That is not a reliable detector.</a:t>
+            </a:r>
+            <a:endParaRPr lang="en-US" sz="1400" dirty="0"/>
+          </a:p>
+        </p:txBody>
+      </p:sp>
+    </p:spTree>
+  </p:cSld>
+  <p:clrMapOvr>
+    <a:masterClrMapping/>
+  </p:clrMapOvr>
+</p:sld>
+</file>
+
+<file path=ppt/slides/slide9.xml><?xml version="1.0" encoding="utf-8"?>
+<p:sld xmlns:a="http://schemas.openxmlformats.org/drawingml/2006/main" xmlns:r="http://schemas.openxmlformats.org/officeDocument/2006/relationships" xmlns:p="http://schemas.openxmlformats.org/presentationml/2006/main">
+  <p:cSld name="Slide 9">
+    <p:spTree>
+      <p:nvGrpSpPr>
+        <p:cNvPr id="1" name=""/>
+        <p:cNvGrpSpPr/>
+        <p:nvPr/>
+      </p:nvGrpSpPr>
+      <p:grpSpPr>
+        <a:xfrm>
+          <a:off x="0" y="0"/>
+          <a:ext cx="0" cy="0"/>
+          <a:chOff x="0" y="0"/>
+          <a:chExt cx="0" cy="0"/>
+        </a:xfrm>
+      </p:grpSpPr>
+      <p:sp>
+        <p:nvSpPr>
+          <p:cNvPr id="2" name="Text 0"/>
+          <p:cNvSpPr/>
+          <p:nvPr/>
+        </p:nvSpPr>
+        <p:spPr>
+          <a:xfrm>
+            <a:off x="640080" y="310896"/>
+            <a:ext cx="10881360" cy="274320"/>
+          </a:xfrm>
+          <a:prstGeom prst="rect">
+            <a:avLst/>
+          </a:prstGeom>
+          <a:noFill/>
+          <a:ln/>
+        </p:spPr>
+        <p:txBody>
+          <a:bodyPr wrap="square" rtlCol="0" anchor="ctr"/>
+          <a:lstStyle/>
+          <a:p>
+            <a:pPr indent="0" marL="0">
+              <a:buNone/>
+            </a:pPr>
+            <a:r>
+              <a:rPr lang="en-US" sz="1200" b="1" spc="200" kern="0" dirty="0">
+                <a:solidFill>
+                  <a:srgbClr val="6B3FA0"/>
+                </a:solidFill>
+                <a:latin typeface="Calibri" pitchFamily="34" charset="0"/>
+                <a:ea typeface="Calibri" pitchFamily="34" charset="-122"/>
+                <a:cs typeface="Calibri" pitchFamily="34" charset="-120"/>
+              </a:rPr>
+              <a:t>BEFORE PUBLICATION</a:t>
+            </a:r>
+            <a:endParaRPr lang="en-US" sz="1200" dirty="0"/>
+          </a:p>
+        </p:txBody>
+      </p:sp>
+      <p:sp>
+        <p:nvSpPr>
+          <p:cNvPr id="3" name="Text 1"/>
+          <p:cNvSpPr/>
+          <p:nvPr/>
+        </p:nvSpPr>
+        <p:spPr>
+          <a:xfrm>
+            <a:off x="640080" y="566928"/>
+            <a:ext cx="10881360" cy="685800"/>
+          </a:xfrm>
+          <a:prstGeom prst="rect">
+            <a:avLst/>
+          </a:prstGeom>
+          <a:noFill/>
+          <a:ln/>
+        </p:spPr>
+        <p:txBody>
+          <a:bodyPr wrap="square" rtlCol="0" anchor="ctr"/>
+          <a:lstStyle/>
+          <a:p>
+            <a:pPr indent="0" marL="0">
+              <a:buNone/>
+            </a:pPr>
+            <a:r>
+              <a:rPr lang="en-US" sz="3400" b="1" dirty="0">
+                <a:solidFill>
+                  <a:srgbClr val="1A1A1A"/>
+                </a:solidFill>
+                <a:latin typeface="Cambria" pitchFamily="34" charset="0"/>
+                <a:ea typeface="Cambria" pitchFamily="34" charset="-122"/>
+                <a:cs typeface="Cambria" pitchFamily="34" charset="-120"/>
+              </a:rPr>
               <a:t>What would have to change</a:t>
             </a:r>
             <a:endParaRPr lang="en-US" sz="3400" dirty="0"/>
@@ -5146,7 +6344,7 @@
       </p:sp>
       <p:graphicFrame>
         <p:nvGraphicFramePr>
-          <p:cNvPr id="9" name="Table 0"/>
+          <p:cNvPr id="10" name="Table 0"/>
           <p:cNvGraphicFramePr>
             <a:graphicFrameLocks noGrp="1"/>
           </p:cNvGraphicFramePr>
@@ -6413,502 +7611,6 @@
 </p:sld>
 </file>
 
-<file path=ppt/slides/slide9.xml><?xml version="1.0" encoding="utf-8"?>
-<p:sld xmlns:a="http://schemas.openxmlformats.org/drawingml/2006/main" xmlns:r="http://schemas.openxmlformats.org/officeDocument/2006/relationships" xmlns:p="http://schemas.openxmlformats.org/presentationml/2006/main">
-  <p:cSld name="Slide 9">
-    <p:bg>
-      <p:bgPr>
-        <a:solidFill>
-          <a:srgbClr val="1B1035"/>
-        </a:solidFill>
-      </p:bgPr>
-    </p:bg>
-    <p:spTree>
-      <p:nvGrpSpPr>
-        <p:cNvPr id="1" name=""/>
-        <p:cNvGrpSpPr/>
-        <p:nvPr/>
-      </p:nvGrpSpPr>
-      <p:grpSpPr>
-        <a:xfrm>
-          <a:off x="0" y="0"/>
-          <a:ext cx="0" cy="0"/>
-          <a:chOff x="0" y="0"/>
-          <a:chExt cx="0" cy="0"/>
-        </a:xfrm>
-      </p:grpSpPr>
-      <p:sp>
-        <p:nvSpPr>
-          <p:cNvPr id="2" name="Text 0"/>
-          <p:cNvSpPr/>
-          <p:nvPr/>
-        </p:nvSpPr>
-        <p:spPr>
-          <a:xfrm>
-            <a:off x="822960" y="640080"/>
-            <a:ext cx="10515600" cy="731520"/>
-          </a:xfrm>
-          <a:prstGeom prst="rect">
-            <a:avLst/>
-          </a:prstGeom>
-          <a:noFill/>
-          <a:ln/>
-        </p:spPr>
-        <p:txBody>
-          <a:bodyPr wrap="square" rtlCol="0" anchor="ctr"/>
-          <a:lstStyle/>
-          <a:p>
-            <a:pPr indent="0" marL="0">
-              <a:buNone/>
-            </a:pPr>
-            <a:r>
-              <a:rPr lang="en-US" sz="3200" b="1" dirty="0">
-                <a:solidFill>
-                  <a:srgbClr val="FFFFFF"/>
-                </a:solidFill>
-                <a:latin typeface="Cambria" pitchFamily="34" charset="0"/>
-                <a:ea typeface="Cambria" pitchFamily="34" charset="-122"/>
-                <a:cs typeface="Cambria" pitchFamily="34" charset="-120"/>
-              </a:rPr>
-              <a:t>What you can and cannot conclude today</a:t>
-            </a:r>
-            <a:endParaRPr lang="en-US" sz="3200" dirty="0"/>
-          </a:p>
-        </p:txBody>
-      </p:sp>
-      <p:sp>
-        <p:nvSpPr>
-          <p:cNvPr id="3" name="Shape 1"/>
-          <p:cNvSpPr/>
-          <p:nvPr/>
-        </p:nvSpPr>
-        <p:spPr>
-          <a:xfrm>
-            <a:off x="822960" y="1600200"/>
-            <a:ext cx="5120640" cy="4023360"/>
-          </a:xfrm>
-          <a:prstGeom prst="roundRect">
-            <a:avLst>
-              <a:gd name="adj" fmla="val 1818"/>
-            </a:avLst>
-          </a:prstGeom>
-          <a:solidFill>
-            <a:srgbClr val="16351F"/>
-          </a:solidFill>
-          <a:ln w="12700">
-            <a:solidFill>
-              <a:srgbClr val="2E7D32"/>
-            </a:solidFill>
-            <a:prstDash val="solid"/>
-          </a:ln>
-        </p:spPr>
-      </p:sp>
-      <p:sp>
-        <p:nvSpPr>
-          <p:cNvPr id="4" name="Text 2"/>
-          <p:cNvSpPr/>
-          <p:nvPr/>
-        </p:nvSpPr>
-        <p:spPr>
-          <a:xfrm>
-            <a:off x="1097280" y="1783080"/>
-            <a:ext cx="4572000" cy="365760"/>
-          </a:xfrm>
-          <a:prstGeom prst="rect">
-            <a:avLst/>
-          </a:prstGeom>
-          <a:noFill/>
-          <a:ln/>
-        </p:spPr>
-        <p:txBody>
-          <a:bodyPr wrap="square" rtlCol="0" anchor="ctr"/>
-          <a:lstStyle/>
-          <a:p>
-            <a:pPr indent="0" marL="0">
-              <a:buNone/>
-            </a:pPr>
-            <a:r>
-              <a:rPr lang="en-US" sz="1700" b="1" dirty="0">
-                <a:solidFill>
-                  <a:srgbClr val="7BC67B"/>
-                </a:solidFill>
-                <a:latin typeface="Calibri" pitchFamily="34" charset="0"/>
-                <a:ea typeface="Calibri" pitchFamily="34" charset="-122"/>
-                <a:cs typeface="Calibri" pitchFamily="34" charset="-120"/>
-              </a:rPr>
-              <a:t>SAFE</a:t>
-            </a:r>
-            <a:endParaRPr lang="en-US" sz="1700" dirty="0"/>
-          </a:p>
-        </p:txBody>
-      </p:sp>
-      <p:sp>
-        <p:nvSpPr>
-          <p:cNvPr id="5" name="Text 3"/>
-          <p:cNvSpPr/>
-          <p:nvPr/>
-        </p:nvSpPr>
-        <p:spPr>
-          <a:xfrm>
-            <a:off x="1097280" y="2240280"/>
-            <a:ext cx="4572000" cy="3200400"/>
-          </a:xfrm>
-          <a:prstGeom prst="rect">
-            <a:avLst/>
-          </a:prstGeom>
-          <a:noFill/>
-          <a:ln/>
-        </p:spPr>
-        <p:txBody>
-          <a:bodyPr wrap="square" rtlCol="0" anchor="ctr"/>
-          <a:lstStyle/>
-          <a:p>
-            <a:pPr marL="342900" indent="-342900">
-              <a:spcAft>
-                <a:spcPts val="800"/>
-              </a:spcAft>
-              <a:buSzPct val="100000"/>
-              <a:buChar char="•"/>
-            </a:pPr>
-            <a:r>
-              <a:rPr lang="en-US" sz="1350" dirty="0">
-                <a:solidFill>
-                  <a:srgbClr val="D8E8D8"/>
-                </a:solidFill>
-                <a:latin typeface="Calibri" pitchFamily="34" charset="0"/>
-                <a:ea typeface="Calibri" pitchFamily="34" charset="-122"/>
-                <a:cs typeface="Calibri" pitchFamily="34" charset="-120"/>
-              </a:rPr>
-              <a:t>Relative comparisons — mutant against wild type, one perturbation against another</a:t>
-            </a:r>
-            <a:endParaRPr lang="en-US" sz="1350" dirty="0"/>
-          </a:p>
-          <a:p>
-            <a:pPr marL="342900" indent="-342900">
-              <a:spcAft>
-                <a:spcPts val="800"/>
-              </a:spcAft>
-              <a:buSzPct val="100000"/>
-              <a:buChar char="•"/>
-            </a:pPr>
-            <a:r>
-              <a:rPr lang="en-US" sz="1350" dirty="0">
-                <a:solidFill>
-                  <a:srgbClr val="D8E8D8"/>
-                </a:solidFill>
-                <a:latin typeface="Calibri" pitchFamily="34" charset="0"/>
-                <a:ea typeface="Calibri" pitchFamily="34" charset="-122"/>
-                <a:cs typeface="Calibri" pitchFamily="34" charset="-120"/>
-              </a:rPr>
-              <a:t>The ordering of which connection is most loaded</a:t>
-            </a:r>
-            <a:endParaRPr lang="en-US" sz="1350" dirty="0"/>
-          </a:p>
-          <a:p>
-            <a:pPr marL="342900" indent="-342900">
-              <a:spcAft>
-                <a:spcPts val="800"/>
-              </a:spcAft>
-              <a:buSzPct val="100000"/>
-              <a:buChar char="•"/>
-            </a:pPr>
-            <a:r>
-              <a:rPr lang="en-US" sz="1350" dirty="0">
-                <a:solidFill>
-                  <a:srgbClr val="D8E8D8"/>
-                </a:solidFill>
-                <a:latin typeface="Calibri" pitchFamily="34" charset="0"/>
-                <a:ea typeface="Calibri" pitchFamily="34" charset="-122"/>
-                <a:cs typeface="Calibri" pitchFamily="34" charset="-120"/>
-              </a:rPr>
-              <a:t>Whether a proposed architecture is geometrically possible at all</a:t>
-            </a:r>
-            <a:endParaRPr lang="en-US" sz="1350" dirty="0"/>
-          </a:p>
-          <a:p>
-            <a:pPr marL="342900" indent="-342900">
-              <a:spcAft>
-                <a:spcPts val="800"/>
-              </a:spcAft>
-              <a:buSzPct val="100000"/>
-              <a:buChar char="•"/>
-            </a:pPr>
-            <a:r>
-              <a:rPr lang="en-US" sz="1350" dirty="0">
-                <a:solidFill>
-                  <a:srgbClr val="D8E8D8"/>
-                </a:solidFill>
-                <a:latin typeface="Calibri" pitchFamily="34" charset="0"/>
-                <a:ea typeface="Calibri" pitchFamily="34" charset="-122"/>
-                <a:cs typeface="Calibri" pitchFamily="34" charset="-120"/>
-              </a:rPr>
-              <a:t>Diameter predictions, the one output with independent support</a:t>
-            </a:r>
-            <a:endParaRPr lang="en-US" sz="1350" dirty="0"/>
-          </a:p>
-          <a:p>
-            <a:pPr marL="342900" indent="-342900">
-              <a:spcAft>
-                <a:spcPts val="800"/>
-              </a:spcAft>
-              <a:buSzPct val="100000"/>
-              <a:buChar char="•"/>
-            </a:pPr>
-            <a:r>
-              <a:rPr lang="en-US" sz="1350" dirty="0">
-                <a:solidFill>
-                  <a:srgbClr val="D8E8D8"/>
-                </a:solidFill>
-                <a:latin typeface="Calibri" pitchFamily="34" charset="0"/>
-                <a:ea typeface="Calibri" pitchFamily="34" charset="-122"/>
-                <a:cs typeface="Calibri" pitchFamily="34" charset="-120"/>
-              </a:rPr>
-              <a:t>Generating hypotheses worth testing at the bench</a:t>
-            </a:r>
-            <a:endParaRPr lang="en-US" sz="1350" dirty="0"/>
-          </a:p>
-        </p:txBody>
-      </p:sp>
-      <p:sp>
-        <p:nvSpPr>
-          <p:cNvPr id="6" name="Shape 4"/>
-          <p:cNvSpPr/>
-          <p:nvPr/>
-        </p:nvSpPr>
-        <p:spPr>
-          <a:xfrm>
-            <a:off x="6263640" y="1600200"/>
-            <a:ext cx="5074920" cy="4023360"/>
-          </a:xfrm>
-          <a:prstGeom prst="roundRect">
-            <a:avLst>
-              <a:gd name="adj" fmla="val 1818"/>
-            </a:avLst>
-          </a:prstGeom>
-          <a:solidFill>
-            <a:srgbClr val="3A1620"/>
-          </a:solidFill>
-          <a:ln w="12700">
-            <a:solidFill>
-              <a:srgbClr val="C62828"/>
-            </a:solidFill>
-            <a:prstDash val="solid"/>
-          </a:ln>
-        </p:spPr>
-      </p:sp>
-      <p:sp>
-        <p:nvSpPr>
-          <p:cNvPr id="7" name="Text 5"/>
-          <p:cNvSpPr/>
-          <p:nvPr/>
-        </p:nvSpPr>
-        <p:spPr>
-          <a:xfrm>
-            <a:off x="6537960" y="1783080"/>
-            <a:ext cx="4572000" cy="365760"/>
-          </a:xfrm>
-          <a:prstGeom prst="rect">
-            <a:avLst/>
-          </a:prstGeom>
-          <a:noFill/>
-          <a:ln/>
-        </p:spPr>
-        <p:txBody>
-          <a:bodyPr wrap="square" rtlCol="0" anchor="ctr"/>
-          <a:lstStyle/>
-          <a:p>
-            <a:pPr indent="0" marL="0">
-              <a:buNone/>
-            </a:pPr>
-            <a:r>
-              <a:rPr lang="en-US" sz="1700" b="1" dirty="0">
-                <a:solidFill>
-                  <a:srgbClr val="F09A9A"/>
-                </a:solidFill>
-                <a:latin typeface="Calibri" pitchFamily="34" charset="0"/>
-                <a:ea typeface="Calibri" pitchFamily="34" charset="-122"/>
-                <a:cs typeface="Calibri" pitchFamily="34" charset="-120"/>
-              </a:rPr>
-              <a:t>NOT SAFE</a:t>
-            </a:r>
-            <a:endParaRPr lang="en-US" sz="1700" dirty="0"/>
-          </a:p>
-        </p:txBody>
-      </p:sp>
-      <p:sp>
-        <p:nvSpPr>
-          <p:cNvPr id="8" name="Text 6"/>
-          <p:cNvSpPr/>
-          <p:nvPr/>
-        </p:nvSpPr>
-        <p:spPr>
-          <a:xfrm>
-            <a:off x="6537960" y="2240280"/>
-            <a:ext cx="4572000" cy="3200400"/>
-          </a:xfrm>
-          <a:prstGeom prst="rect">
-            <a:avLst/>
-          </a:prstGeom>
-          <a:noFill/>
-          <a:ln/>
-        </p:spPr>
-        <p:txBody>
-          <a:bodyPr wrap="square" rtlCol="0" anchor="ctr"/>
-          <a:lstStyle/>
-          <a:p>
-            <a:pPr marL="342900" indent="-342900">
-              <a:spcAft>
-                <a:spcPts val="800"/>
-              </a:spcAft>
-              <a:buSzPct val="100000"/>
-              <a:buChar char="•"/>
-            </a:pPr>
-            <a:r>
-              <a:rPr lang="en-US" sz="1350" dirty="0">
-                <a:solidFill>
-                  <a:srgbClr val="F0D8D8"/>
-                </a:solidFill>
-                <a:latin typeface="Calibri" pitchFamily="34" charset="0"/>
-                <a:ea typeface="Calibri" pitchFamily="34" charset="-122"/>
-                <a:cs typeface="Calibri" pitchFamily="34" charset="-120"/>
-              </a:rPr>
-              <a:t>“Wild type is optimal” as an independent finding — it is largely built in</a:t>
-            </a:r>
-            <a:endParaRPr lang="en-US" sz="1350" dirty="0"/>
-          </a:p>
-          <a:p>
-            <a:pPr marL="342900" indent="-342900">
-              <a:spcAft>
-                <a:spcPts val="800"/>
-              </a:spcAft>
-              <a:buSzPct val="100000"/>
-              <a:buChar char="•"/>
-            </a:pPr>
-            <a:r>
-              <a:rPr lang="en-US" sz="1350" dirty="0">
-                <a:solidFill>
-                  <a:srgbClr val="F0D8D8"/>
-                </a:solidFill>
-                <a:latin typeface="Calibri" pitchFamily="34" charset="0"/>
-                <a:ea typeface="Calibri" pitchFamily="34" charset="-122"/>
-                <a:cs typeface="Calibri" pitchFamily="34" charset="-120"/>
-              </a:rPr>
-              <a:t>Absolute strain values, forces, or rupture thresholds</a:t>
-            </a:r>
-            <a:endParaRPr lang="en-US" sz="1350" dirty="0"/>
-          </a:p>
-          <a:p>
-            <a:pPr marL="342900" indent="-342900">
-              <a:spcAft>
-                <a:spcPts val="800"/>
-              </a:spcAft>
-              <a:buSzPct val="100000"/>
-              <a:buChar char="•"/>
-            </a:pPr>
-            <a:r>
-              <a:rPr lang="en-US" sz="1350" dirty="0">
-                <a:solidFill>
-                  <a:srgbClr val="F0D8D8"/>
-                </a:solidFill>
-                <a:latin typeface="Calibri" pitchFamily="34" charset="0"/>
-                <a:ea typeface="Calibri" pitchFamily="34" charset="-122"/>
-                <a:cs typeface="Calibri" pitchFamily="34" charset="-120"/>
-              </a:rPr>
-              <a:t>Any claim about twist, axial gradients or assembly over time</a:t>
-            </a:r>
-            <a:endParaRPr lang="en-US" sz="1350" dirty="0"/>
-          </a:p>
-          <a:p>
-            <a:pPr marL="342900" indent="-342900">
-              <a:spcAft>
-                <a:spcPts val="800"/>
-              </a:spcAft>
-              <a:buSzPct val="100000"/>
-              <a:buChar char="•"/>
-            </a:pPr>
-            <a:r>
-              <a:rPr lang="en-US" sz="1350" dirty="0">
-                <a:solidFill>
-                  <a:srgbClr val="F0D8D8"/>
-                </a:solidFill>
-                <a:latin typeface="Calibri" pitchFamily="34" charset="0"/>
-                <a:ea typeface="Calibri" pitchFamily="34" charset="-122"/>
-                <a:cs typeface="Calibri" pitchFamily="34" charset="-120"/>
-              </a:rPr>
-              <a:t>Precision beyond about 1 nm and a few degrees</a:t>
-            </a:r>
-            <a:endParaRPr lang="en-US" sz="1350" dirty="0"/>
-          </a:p>
-          <a:p>
-            <a:pPr marL="342900" indent="-342900">
-              <a:spcAft>
-                <a:spcPts val="800"/>
-              </a:spcAft>
-              <a:buSzPct val="100000"/>
-              <a:buChar char="•"/>
-            </a:pPr>
-            <a:r>
-              <a:rPr lang="en-US" sz="1350" dirty="0">
-                <a:solidFill>
-                  <a:srgbClr val="F0D8D8"/>
-                </a:solidFill>
-                <a:latin typeface="Calibri" pitchFamily="34" charset="0"/>
-                <a:ea typeface="Calibri" pitchFamily="34" charset="-122"/>
-                <a:cs typeface="Calibri" pitchFamily="34" charset="-120"/>
-              </a:rPr>
-              <a:t>Negative results on questions the 2D geometry cannot represent</a:t>
-            </a:r>
-            <a:endParaRPr lang="en-US" sz="1350" dirty="0"/>
-          </a:p>
-        </p:txBody>
-      </p:sp>
-      <p:sp>
-        <p:nvSpPr>
-          <p:cNvPr id="9" name="Text 7"/>
-          <p:cNvSpPr/>
-          <p:nvPr/>
-        </p:nvSpPr>
-        <p:spPr>
-          <a:xfrm>
-            <a:off x="822960" y="5897880"/>
-            <a:ext cx="10515600" cy="640080"/>
-          </a:xfrm>
-          <a:prstGeom prst="rect">
-            <a:avLst/>
-          </a:prstGeom>
-          <a:noFill/>
-          <a:ln/>
-        </p:spPr>
-        <p:txBody>
-          <a:bodyPr wrap="square" rtlCol="0" anchor="ctr"/>
-          <a:lstStyle/>
-          <a:p>
-            <a:pPr indent="0" marL="0">
-              <a:buNone/>
-            </a:pPr>
-            <a:r>
-              <a:rPr lang="en-US" sz="1500" i="1" dirty="0">
-                <a:solidFill>
-                  <a:srgbClr val="2FA8A8"/>
-                </a:solidFill>
-                <a:latin typeface="Calibri" pitchFamily="34" charset="0"/>
-                <a:ea typeface="Calibri" pitchFamily="34" charset="-122"/>
-                <a:cs typeface="Calibri" pitchFamily="34" charset="-120"/>
-              </a:rPr>
-              <a:t>Bottom line: a well-built hypothesis generator that has not yet been independently validated. Use it to decide what to measure, not to conclude what is true.</a:t>
-            </a:r>
-            <a:endParaRPr lang="en-US" sz="1500" dirty="0"/>
-          </a:p>
-        </p:txBody>
-      </p:sp>
-    </p:spTree>
-  </p:cSld>
-  <p:clrMapOvr>
-    <a:masterClrMapping/>
-  </p:clrMapOvr>
-</p:sld>
-</file>
-
 <file path=ppt/theme/theme1.xml><?xml version="1.0" encoding="utf-8"?>
 <a:theme xmlns:a="http://schemas.openxmlformats.org/drawingml/2006/main" name="Office Theme">
   <a:themeElements>
